--- a/TaiLieuGiangDay_UngDungAI/BaiGiang_UngDungAI_PhanTichDuLieu.pptx
+++ b/TaiLieuGiangDay_UngDungAI/BaiGiang_UngDungAI_PhanTichDuLieu.pptx
@@ -129,7 +129,7 @@
   <p:extLst>
     <p:ext uri="{521415D9-36F7-43E2-AB2F-B90AF26B5E84}">
       <p14:sectionLst xmlns:p14="http://schemas.microsoft.com/office/powerpoint/2010/main">
-        <p14:section name="Mở đầu" id="{e05948ed-eef7-e9fa-4ac3-4a22d781231b}">
+        <p14:section name="Mở đầu" id="{1fdd5f80-0ec0-91c4-b0f5-614778d7ea2e}">
           <p14:sldIdLst>
             <p14:sldId id="256"/>
             <p14:sldId id="257"/>
@@ -138,7 +138,7 @@
             <p14:sldId id="260"/>
           </p14:sldIdLst>
         </p14:section>
-        <p14:section name="Khám phá &amp; Làm sạch" id="{36e1798e-11cd-5904-57a3-13d53e5b4cd7}">
+        <p14:section name="Khám phá &amp; Làm sạch" id="{d9fbc1d7-69a4-60d3-bf23-857381b70cfc}">
           <p14:sldIdLst>
             <p14:sldId id="261"/>
             <p14:sldId id="262"/>
@@ -147,7 +147,7 @@
             <p14:sldId id="265"/>
           </p14:sldIdLst>
         </p14:section>
-        <p14:section name="Biểu đồ &amp; Tri thức" id="{04b8d816-68d9-fb50-a3d8-844090056b16}">
+        <p14:section name="Biểu đồ &amp; Tri thức" id="{a64e44a9-85e9-a353-f1aa-973701171790}">
           <p14:sldIdLst>
             <p14:sldId id="266"/>
             <p14:sldId id="267"/>
@@ -155,7 +155,7 @@
             <p14:sldId id="269"/>
           </p14:sldIdLst>
         </p14:section>
-        <p14:section name="Khi AI sai" id="{15785c87-471e-9f4d-9bce-5e2cd137cb3e}">
+        <p14:section name="Khi AI sai" id="{27e3407c-c39b-3282-21a3-7eeccf3324f4}">
           <p14:sldIdLst>
             <p14:sldId id="270"/>
             <p14:sldId id="271"/>
@@ -164,14 +164,14 @@
             <p14:sldId id="274"/>
           </p14:sldIdLst>
         </p14:section>
-        <p14:section name="Trình bày &amp; Đạo đức" id="{b7a50a00-25a0-555a-e652-427d26dc33c0}">
+        <p14:section name="Trình bày &amp; Đạo đức" id="{b6a80acd-1638-0dbd-5bfe-7c40891992b2}">
           <p14:sldIdLst>
             <p14:sldId id="275"/>
             <p14:sldId id="276"/>
             <p14:sldId id="277"/>
           </p14:sldIdLst>
         </p14:section>
-        <p14:section name="Kết thúc" id="{6dfe781c-bb9e-6998-3646-e4c0067c8d35}">
+        <p14:section name="Kết thúc" id="{886e0c95-2608-1d77-ec9d-5bee54332b96}">
           <p14:sldIdLst>
             <p14:sldId id="278"/>
           </p14:sldIdLst>
@@ -3485,7 +3485,53 @@
       </p:grpSpPr>
       <p:sp>
         <p:nvSpPr>
-          <p:cNvPr id="2" name="Text 0"/>
+          <p:cNvPr id="2" name="hutech_card"/>
+          <p:cNvSpPr/>
+          <p:nvPr/>
+        </p:nvSpPr>
+        <p:spPr>
+          <a:xfrm>
+            <a:off x="841248" y="475488"/>
+            <a:ext cx="2395728" cy="713232"/>
+          </a:xfrm>
+          <a:prstGeom prst="roundRect">
+            <a:avLst>
+              <a:gd name="adj" fmla="val 10256"/>
+            </a:avLst>
+          </a:prstGeom>
+          <a:solidFill>
+            <a:srgbClr val="FFFFFF"/>
+          </a:solidFill>
+          <a:ln/>
+        </p:spPr>
+      </p:sp>
+      <p:pic>
+        <p:nvPicPr>
+          <p:cNvPr id="3" name="Image 0" descr="/tmp/claude-0/-home-user-about/7f9787d4-c743-5828-973b-7494043f4138/scratchpad/slides/img/hutech_ngang.png">    </p:cNvPr>
+          <p:cNvPicPr>
+            <a:picLocks noChangeAspect="1"/>
+          </p:cNvPicPr>
+          <p:nvPr/>
+        </p:nvPicPr>
+        <p:blipFill>
+          <a:blip r:embed="rId1"/>
+          <a:stretch>
+            <a:fillRect/>
+          </a:stretch>
+        </p:blipFill>
+        <p:spPr>
+          <a:xfrm>
+            <a:off x="969264" y="621792"/>
+            <a:ext cx="2139696" cy="420624"/>
+          </a:xfrm>
+          <a:prstGeom prst="rect">
+            <a:avLst/>
+          </a:prstGeom>
+        </p:spPr>
+      </p:pic>
+      <p:sp>
+        <p:nvSpPr>
+          <p:cNvPr id="4" name="Text 0"/>
           <p:cNvSpPr txBox="1"/>
           <p:nvPr>
             <p:ph idx="100" type="body" hasCustomPrompt="1"/>
@@ -3523,7 +3569,7 @@
       </p:sp>
       <p:sp>
         <p:nvSpPr>
-          <p:cNvPr id="3" name="Text 0"/>
+          <p:cNvPr id="5" name="Text 0"/>
           <p:cNvSpPr txBox="1"/>
           <p:nvPr>
             <p:ph idx="101" type="title" hasCustomPrompt="1"/>
@@ -3561,7 +3607,7 @@
       </p:sp>
       <p:sp>
         <p:nvSpPr>
-          <p:cNvPr id="4" name="Text 0"/>
+          <p:cNvPr id="6" name="Text 0"/>
           <p:cNvSpPr txBox="1"/>
           <p:nvPr>
             <p:ph idx="102" type="body" hasCustomPrompt="1"/>
